--- a/DeepGen/DeepGen-3D-WM-Napucheng.pptx
+++ b/DeepGen/DeepGen-3D-WM-Napucheng.pptx
@@ -15,7 +15,8 @@
     <p:sldId id="260" r:id="rId8"/>
     <p:sldId id="289" r:id="rId9"/>
     <p:sldId id="287" r:id="rId10"/>
-    <p:sldId id="292" r:id="rId11"/>
+    <p:sldId id="295" r:id="rId11"/>
+    <p:sldId id="294" r:id="rId12"/>
   </p:sldIdLst>
   <p:sldSz cx="12192000" cy="6858000"/>
   <p:notesSz cx="6858000" cy="9144000"/>
@@ -6178,7 +6179,7 @@
                 <a:latin typeface="华文楷体" panose="02010600040101010101" pitchFamily="2" charset="-122"/>
                 <a:ea typeface="华文楷体" panose="02010600040101010101" pitchFamily="2" charset="-122"/>
               </a:rPr>
-              <a:t>Deep Gen/3D/WM Survey&amp;try</a:t>
+              <a:t>Deep Gen/3D Survey&amp;try</a:t>
             </a:r>
             <a:endParaRPr lang="en-US" dirty="0">
               <a:latin typeface="华文楷体" panose="02010600040101010101" pitchFamily="2" charset="-122"/>
@@ -6304,7 +6305,7 @@
         <p:spPr>
           <a:xfrm>
             <a:off x="838200" y="1390650"/>
-            <a:ext cx="10515600" cy="4351338"/>
+            <a:ext cx="5116830" cy="4351655"/>
           </a:xfrm>
         </p:spPr>
         <p:txBody>
@@ -6454,6 +6455,261 @@
                 <a:ea typeface="华文楷体" panose="02010600040101010101" pitchFamily="2" charset="-122"/>
               </a:rPr>
               <a:t>SD3.0</a:t>
+            </a:r>
+            <a:endParaRPr lang="en-US" altLang="zh-CN" dirty="0">
+              <a:latin typeface="华文楷体" panose="02010600040101010101" pitchFamily="2" charset="-122"/>
+              <a:ea typeface="华文楷体" panose="02010600040101010101" pitchFamily="2" charset="-122"/>
+            </a:endParaRPr>
+          </a:p>
+          <a:p>
+            <a:endParaRPr lang="en-US" altLang="zh-CN" dirty="0">
+              <a:latin typeface="华文楷体" panose="02010600040101010101" pitchFamily="2" charset="-122"/>
+              <a:ea typeface="华文楷体" panose="02010600040101010101" pitchFamily="2" charset="-122"/>
+            </a:endParaRPr>
+          </a:p>
+          <a:p>
+            <a:pPr marL="0" indent="0">
+              <a:buNone/>
+            </a:pPr>
+            <a:endParaRPr lang="zh-CN" altLang="en-US" dirty="0">
+              <a:latin typeface="华文楷体" panose="02010600040101010101" pitchFamily="2" charset="-122"/>
+              <a:ea typeface="华文楷体" panose="02010600040101010101" pitchFamily="2" charset="-122"/>
+            </a:endParaRPr>
+          </a:p>
+          <a:p>
+            <a:pPr marL="0" indent="0">
+              <a:buNone/>
+            </a:pPr>
+            <a:endParaRPr lang="en-US" altLang="zh-CN" dirty="0">
+              <a:latin typeface="华文楷体" panose="02010600040101010101" pitchFamily="2" charset="-122"/>
+              <a:ea typeface="华文楷体" panose="02010600040101010101" pitchFamily="2" charset="-122"/>
+            </a:endParaRPr>
+          </a:p>
+          <a:p>
+            <a:pPr marL="0" indent="0">
+              <a:buNone/>
+            </a:pPr>
+            <a:endParaRPr lang="en-US" altLang="zh-CN" dirty="0">
+              <a:latin typeface="华文楷体" panose="02010600040101010101" pitchFamily="2" charset="-122"/>
+              <a:ea typeface="华文楷体" panose="02010600040101010101" pitchFamily="2" charset="-122"/>
+            </a:endParaRPr>
+          </a:p>
+          <a:p>
+            <a:pPr marL="457200" lvl="1" indent="0">
+              <a:buNone/>
+            </a:pPr>
+            <a:endParaRPr lang="en-US" altLang="zh-CN" dirty="0">
+              <a:latin typeface="华文楷体" panose="02010600040101010101" pitchFamily="2" charset="-122"/>
+              <a:ea typeface="华文楷体" panose="02010600040101010101" pitchFamily="2" charset="-122"/>
+            </a:endParaRPr>
+          </a:p>
+        </p:txBody>
+      </p:sp>
+      <p:sp>
+        <p:nvSpPr>
+          <p:cNvPr id="4" name="内容占位符 2"/>
+          <p:cNvSpPr>
+            <a:spLocks noGrp="1"/>
+          </p:cNvSpPr>
+          <p:nvPr/>
+        </p:nvSpPr>
+        <p:spPr>
+          <a:xfrm>
+            <a:off x="6149975" y="1390650"/>
+            <a:ext cx="5116830" cy="5386705"/>
+          </a:xfrm>
+          <a:prstGeom prst="rect">
+            <a:avLst/>
+          </a:prstGeom>
+        </p:spPr>
+        <p:txBody>
+          <a:bodyPr vert="horz" lIns="91440" tIns="45720" rIns="91440" bIns="45720" rtlCol="0">
+            <a:noAutofit/>
+          </a:bodyPr>
+          <a:lstStyle>
+            <a:lvl1pPr marL="228600" indent="-228600" algn="l" defTabSz="914400" rtl="0" eaLnBrk="1" latinLnBrk="0" hangingPunct="1">
+              <a:lnSpc>
+                <a:spcPct val="90000"/>
+              </a:lnSpc>
+              <a:spcBef>
+                <a:spcPts val="1000"/>
+              </a:spcBef>
+              <a:buFont typeface="Arial" panose="020B0604020202020204" pitchFamily="34" charset="0"/>
+              <a:buChar char="•"/>
+              <a:defRPr sz="2800" kern="1200">
+                <a:solidFill>
+                  <a:schemeClr val="tx1"/>
+                </a:solidFill>
+                <a:latin typeface="+mn-lt"/>
+                <a:ea typeface="+mn-ea"/>
+                <a:cs typeface="+mn-cs"/>
+              </a:defRPr>
+            </a:lvl1pPr>
+            <a:lvl2pPr marL="685800" indent="-228600" algn="l" defTabSz="914400" rtl="0" eaLnBrk="1" latinLnBrk="0" hangingPunct="1">
+              <a:lnSpc>
+                <a:spcPct val="90000"/>
+              </a:lnSpc>
+              <a:spcBef>
+                <a:spcPts val="500"/>
+              </a:spcBef>
+              <a:buFont typeface="Arial" panose="020B0604020202020204" pitchFamily="34" charset="0"/>
+              <a:buChar char="•"/>
+              <a:defRPr sz="2400" kern="1200">
+                <a:solidFill>
+                  <a:schemeClr val="tx1"/>
+                </a:solidFill>
+                <a:latin typeface="+mn-lt"/>
+                <a:ea typeface="+mn-ea"/>
+                <a:cs typeface="+mn-cs"/>
+              </a:defRPr>
+            </a:lvl2pPr>
+            <a:lvl3pPr marL="1143000" indent="-228600" algn="l" defTabSz="914400" rtl="0" eaLnBrk="1" latinLnBrk="0" hangingPunct="1">
+              <a:lnSpc>
+                <a:spcPct val="90000"/>
+              </a:lnSpc>
+              <a:spcBef>
+                <a:spcPts val="500"/>
+              </a:spcBef>
+              <a:buFont typeface="Arial" panose="020B0604020202020204" pitchFamily="34" charset="0"/>
+              <a:buChar char="•"/>
+              <a:defRPr sz="2000" kern="1200">
+                <a:solidFill>
+                  <a:schemeClr val="tx1"/>
+                </a:solidFill>
+                <a:latin typeface="+mn-lt"/>
+                <a:ea typeface="+mn-ea"/>
+                <a:cs typeface="+mn-cs"/>
+              </a:defRPr>
+            </a:lvl3pPr>
+            <a:lvl4pPr marL="1600200" indent="-228600" algn="l" defTabSz="914400" rtl="0" eaLnBrk="1" latinLnBrk="0" hangingPunct="1">
+              <a:lnSpc>
+                <a:spcPct val="90000"/>
+              </a:lnSpc>
+              <a:spcBef>
+                <a:spcPts val="500"/>
+              </a:spcBef>
+              <a:buFont typeface="Arial" panose="020B0604020202020204" pitchFamily="34" charset="0"/>
+              <a:buChar char="•"/>
+              <a:defRPr sz="1800" kern="1200">
+                <a:solidFill>
+                  <a:schemeClr val="tx1"/>
+                </a:solidFill>
+                <a:latin typeface="+mn-lt"/>
+                <a:ea typeface="+mn-ea"/>
+                <a:cs typeface="+mn-cs"/>
+              </a:defRPr>
+            </a:lvl4pPr>
+            <a:lvl5pPr marL="2057400" indent="-228600" algn="l" defTabSz="914400" rtl="0" eaLnBrk="1" latinLnBrk="0" hangingPunct="1">
+              <a:lnSpc>
+                <a:spcPct val="90000"/>
+              </a:lnSpc>
+              <a:spcBef>
+                <a:spcPts val="500"/>
+              </a:spcBef>
+              <a:buFont typeface="Arial" panose="020B0604020202020204" pitchFamily="34" charset="0"/>
+              <a:buChar char="•"/>
+              <a:defRPr sz="1800" kern="1200">
+                <a:solidFill>
+                  <a:schemeClr val="tx1"/>
+                </a:solidFill>
+                <a:latin typeface="+mn-lt"/>
+                <a:ea typeface="+mn-ea"/>
+                <a:cs typeface="+mn-cs"/>
+              </a:defRPr>
+            </a:lvl5pPr>
+            <a:lvl6pPr marL="2514600" indent="-228600" algn="l" defTabSz="914400" rtl="0" eaLnBrk="1" latinLnBrk="0" hangingPunct="1">
+              <a:lnSpc>
+                <a:spcPct val="90000"/>
+              </a:lnSpc>
+              <a:spcBef>
+                <a:spcPts val="500"/>
+              </a:spcBef>
+              <a:buFont typeface="Arial" panose="020B0604020202020204" pitchFamily="34" charset="0"/>
+              <a:buChar char="•"/>
+              <a:defRPr sz="1800" kern="1200">
+                <a:solidFill>
+                  <a:schemeClr val="tx1"/>
+                </a:solidFill>
+                <a:latin typeface="+mn-lt"/>
+                <a:ea typeface="+mn-ea"/>
+                <a:cs typeface="+mn-cs"/>
+              </a:defRPr>
+            </a:lvl6pPr>
+            <a:lvl7pPr marL="2971800" indent="-228600" algn="l" defTabSz="914400" rtl="0" eaLnBrk="1" latinLnBrk="0" hangingPunct="1">
+              <a:lnSpc>
+                <a:spcPct val="90000"/>
+              </a:lnSpc>
+              <a:spcBef>
+                <a:spcPts val="500"/>
+              </a:spcBef>
+              <a:buFont typeface="Arial" panose="020B0604020202020204" pitchFamily="34" charset="0"/>
+              <a:buChar char="•"/>
+              <a:defRPr sz="1800" kern="1200">
+                <a:solidFill>
+                  <a:schemeClr val="tx1"/>
+                </a:solidFill>
+                <a:latin typeface="+mn-lt"/>
+                <a:ea typeface="+mn-ea"/>
+                <a:cs typeface="+mn-cs"/>
+              </a:defRPr>
+            </a:lvl7pPr>
+            <a:lvl8pPr marL="3429000" indent="-228600" algn="l" defTabSz="914400" rtl="0" eaLnBrk="1" latinLnBrk="0" hangingPunct="1">
+              <a:lnSpc>
+                <a:spcPct val="90000"/>
+              </a:lnSpc>
+              <a:spcBef>
+                <a:spcPts val="500"/>
+              </a:spcBef>
+              <a:buFont typeface="Arial" panose="020B0604020202020204" pitchFamily="34" charset="0"/>
+              <a:buChar char="•"/>
+              <a:defRPr sz="1800" kern="1200">
+                <a:solidFill>
+                  <a:schemeClr val="tx1"/>
+                </a:solidFill>
+                <a:latin typeface="+mn-lt"/>
+                <a:ea typeface="+mn-ea"/>
+                <a:cs typeface="+mn-cs"/>
+              </a:defRPr>
+            </a:lvl8pPr>
+            <a:lvl9pPr marL="3886200" indent="-228600" algn="l" defTabSz="914400" rtl="0" eaLnBrk="1" latinLnBrk="0" hangingPunct="1">
+              <a:lnSpc>
+                <a:spcPct val="90000"/>
+              </a:lnSpc>
+              <a:spcBef>
+                <a:spcPts val="500"/>
+              </a:spcBef>
+              <a:buFont typeface="Arial" panose="020B0604020202020204" pitchFamily="34" charset="0"/>
+              <a:buChar char="•"/>
+              <a:defRPr sz="1800" kern="1200">
+                <a:solidFill>
+                  <a:schemeClr val="tx1"/>
+                </a:solidFill>
+                <a:latin typeface="+mn-lt"/>
+                <a:ea typeface="+mn-ea"/>
+                <a:cs typeface="+mn-cs"/>
+              </a:defRPr>
+            </a:lvl9pPr>
+          </a:lstStyle>
+          <a:p>
+            <a:r>
+              <a:rPr lang="en-US" altLang="zh-CN" dirty="0">
+                <a:latin typeface="华文楷体" panose="02010600040101010101" pitchFamily="2" charset="-122"/>
+                <a:ea typeface="华文楷体" panose="02010600040101010101" pitchFamily="2" charset="-122"/>
+              </a:rPr>
+              <a:t>DiT</a:t>
+            </a:r>
+            <a:endParaRPr lang="en-US" altLang="zh-CN" dirty="0">
+              <a:latin typeface="华文楷体" panose="02010600040101010101" pitchFamily="2" charset="-122"/>
+              <a:ea typeface="华文楷体" panose="02010600040101010101" pitchFamily="2" charset="-122"/>
+            </a:endParaRPr>
+          </a:p>
+          <a:p>
+            <a:r>
+              <a:rPr lang="en-US" altLang="zh-CN" dirty="0">
+                <a:latin typeface="华文楷体" panose="02010600040101010101" pitchFamily="2" charset="-122"/>
+                <a:ea typeface="华文楷体" panose="02010600040101010101" pitchFamily="2" charset="-122"/>
+              </a:rPr>
+              <a:t>Flow</a:t>
             </a:r>
             <a:endParaRPr lang="en-US" altLang="zh-CN" dirty="0">
               <a:latin typeface="华文楷体" panose="02010600040101010101" pitchFamily="2" charset="-122"/>
@@ -6771,7 +7027,7 @@
                 <a:latin typeface="华文楷体" panose="02010600040101010101" pitchFamily="2" charset="-122"/>
                 <a:ea typeface="华文楷体" panose="02010600040101010101" pitchFamily="2" charset="-122"/>
               </a:rPr>
-              <a:t>Codex cli</a:t>
+              <a:t>Codex(cli)</a:t>
             </a:r>
             <a:endParaRPr lang="en-US" altLang="zh-CN" dirty="0">
               <a:latin typeface="华文楷体" panose="02010600040101010101" pitchFamily="2" charset="-122"/>
@@ -6805,6 +7061,48 @@
             </a:endParaRPr>
           </a:p>
           <a:p>
+            <a:r>
+              <a:rPr lang="en-US" altLang="zh-CN" dirty="0">
+                <a:latin typeface="华文楷体" panose="02010600040101010101" pitchFamily="2" charset="-122"/>
+                <a:ea typeface="华文楷体" panose="02010600040101010101" pitchFamily="2" charset="-122"/>
+              </a:rPr>
+              <a:t>Nvidia RTX5070</a:t>
+            </a:r>
+            <a:endParaRPr lang="en-US" altLang="zh-CN" dirty="0">
+              <a:latin typeface="华文楷体" panose="02010600040101010101" pitchFamily="2" charset="-122"/>
+              <a:ea typeface="华文楷体" panose="02010600040101010101" pitchFamily="2" charset="-122"/>
+            </a:endParaRPr>
+          </a:p>
+          <a:p>
+            <a:r>
+              <a:rPr lang="en-US" altLang="zh-CN" dirty="0">
+                <a:latin typeface="华文楷体" panose="02010600040101010101" pitchFamily="2" charset="-122"/>
+                <a:ea typeface="华文楷体" panose="02010600040101010101" pitchFamily="2" charset="-122"/>
+              </a:rPr>
+              <a:t>Meshlab</a:t>
+            </a:r>
+            <a:endParaRPr lang="en-US" altLang="zh-CN" dirty="0">
+              <a:latin typeface="华文楷体" panose="02010600040101010101" pitchFamily="2" charset="-122"/>
+              <a:ea typeface="华文楷体" panose="02010600040101010101" pitchFamily="2" charset="-122"/>
+            </a:endParaRPr>
+          </a:p>
+          <a:p>
+            <a:r>
+              <a:rPr lang="en-US" altLang="zh-CN" dirty="0">
+                <a:latin typeface="华文楷体" panose="02010600040101010101" pitchFamily="2" charset="-122"/>
+                <a:ea typeface="华文楷体" panose="02010600040101010101" pitchFamily="2" charset="-122"/>
+              </a:rPr>
+              <a:t>Blender</a:t>
+            </a:r>
+            <a:endParaRPr lang="en-US" altLang="zh-CN" dirty="0">
+              <a:latin typeface="华文楷体" panose="02010600040101010101" pitchFamily="2" charset="-122"/>
+              <a:ea typeface="华文楷体" panose="02010600040101010101" pitchFamily="2" charset="-122"/>
+            </a:endParaRPr>
+          </a:p>
+          <a:p>
+            <a:pPr marL="0" indent="0">
+              <a:buNone/>
+            </a:pPr>
             <a:endParaRPr lang="en-US" altLang="zh-CN" dirty="0">
               <a:latin typeface="华文楷体" panose="02010600040101010101" pitchFamily="2" charset="-122"/>
               <a:ea typeface="华文楷体" panose="02010600040101010101" pitchFamily="2" charset="-122"/>
@@ -6903,7 +7201,7 @@
                 <a:latin typeface="华文楷体" panose="02010600040101010101" pitchFamily="2" charset="-122"/>
                 <a:ea typeface="华文楷体" panose="02010600040101010101" pitchFamily="2" charset="-122"/>
               </a:rPr>
-              <a:t>Point Cloud/Mesh/Voxel</a:t>
+              <a:t>Point Cloud/Mesh/Voxel/SDF/Neural Fields/Camera Geometry</a:t>
             </a:r>
             <a:endParaRPr lang="en-US" altLang="zh-CN" dirty="0">
               <a:solidFill>
@@ -6922,7 +7220,7 @@
                 <a:latin typeface="华文楷体" panose="02010600040101010101" pitchFamily="2" charset="-122"/>
                 <a:ea typeface="华文楷体" panose="02010600040101010101" pitchFamily="2" charset="-122"/>
               </a:rPr>
-              <a:t>Differentiable Rendering</a:t>
+              <a:t>Deep-learning-freindly 3D Representation Learning</a:t>
             </a:r>
             <a:endParaRPr lang="en-US" altLang="zh-CN" dirty="0">
               <a:solidFill>
@@ -6941,7 +7239,7 @@
                 <a:latin typeface="华文楷体" panose="02010600040101010101" pitchFamily="2" charset="-122"/>
                 <a:ea typeface="华文楷体" panose="02010600040101010101" pitchFamily="2" charset="-122"/>
               </a:rPr>
-              <a:t>SDF</a:t>
+              <a:t>COLMAP/SfM(Structure from Motion)/MVS(Multi-View Stereo)</a:t>
             </a:r>
             <a:endParaRPr lang="en-US" altLang="zh-CN" dirty="0">
               <a:solidFill>
@@ -6969,7 +7267,7 @@
                 <a:latin typeface="华文楷体" panose="02010600040101010101" pitchFamily="2" charset="-122"/>
                 <a:ea typeface="华文楷体" panose="02010600040101010101" pitchFamily="2" charset="-122"/>
               </a:rPr>
-              <a:t>NeRF-nerfstudio</a:t>
+              <a:t>NeRF-Nerfstudio</a:t>
             </a:r>
             <a:endParaRPr lang="en-US" altLang="zh-CN" dirty="0">
               <a:solidFill>
@@ -7035,7 +7333,7 @@
                 <a:latin typeface="华文楷体" panose="02010600040101010101" pitchFamily="2" charset="-122"/>
                 <a:ea typeface="华文楷体" panose="02010600040101010101" pitchFamily="2" charset="-122"/>
               </a:rPr>
-              <a:t>Games202*</a:t>
+              <a:t>Games102</a:t>
             </a:r>
             <a:endParaRPr lang="en-US" altLang="zh-CN" dirty="0">
               <a:solidFill>
@@ -7054,7 +7352,7 @@
                 <a:latin typeface="华文楷体" panose="02010600040101010101" pitchFamily="2" charset="-122"/>
                 <a:ea typeface="华文楷体" panose="02010600040101010101" pitchFamily="2" charset="-122"/>
               </a:rPr>
-              <a:t>Games102</a:t>
+              <a:t>Pytorch3D/Open3D</a:t>
             </a:r>
             <a:endParaRPr lang="en-US" altLang="zh-CN" dirty="0">
               <a:solidFill>
@@ -7132,17 +7430,22 @@
             <p:ph idx="1"/>
           </p:nvPr>
         </p:nvSpPr>
-        <p:spPr/>
-        <p:txBody>
-          <a:bodyPr/>
-          <a:lstStyle/>
-          <a:p>
-            <a:r>
-              <a:rPr lang="zh-CN" altLang="en-US" dirty="0">
+        <p:spPr>
+          <a:xfrm>
+            <a:off x="838200" y="1383665"/>
+            <a:ext cx="10515600" cy="4351338"/>
+          </a:xfrm>
+        </p:spPr>
+        <p:txBody>
+          <a:bodyPr/>
+          <a:lstStyle/>
+          <a:p>
+            <a:r>
+              <a:rPr lang="en-US" altLang="zh-CN" dirty="0">
                 <a:latin typeface="华文楷体" panose="02010600040101010101" pitchFamily="2" charset="-122"/>
                 <a:ea typeface="华文楷体" panose="02010600040101010101" pitchFamily="2" charset="-122"/>
               </a:rPr>
-              <a:t>问题是有限的</a:t>
+              <a:t>VAE/Diffusion from scratch for Mnist</a:t>
             </a:r>
             <a:endParaRPr lang="en-US" altLang="zh-CN" dirty="0">
               <a:latin typeface="华文楷体" panose="02010600040101010101" pitchFamily="2" charset="-122"/>
@@ -7150,53 +7453,30 @@
             </a:endParaRPr>
           </a:p>
           <a:p>
-            <a:r>
-              <a:rPr lang="zh-CN" altLang="en-US" dirty="0">
-                <a:latin typeface="华文楷体" panose="02010600040101010101" pitchFamily="2" charset="-122"/>
-                <a:ea typeface="华文楷体" panose="02010600040101010101" pitchFamily="2" charset="-122"/>
-              </a:rPr>
-              <a:t>解法存在很多，但是哪一个是正确的或者相对正确的不清楚</a:t>
-            </a:r>
             <a:endParaRPr lang="en-US" altLang="zh-CN" dirty="0">
               <a:latin typeface="华文楷体" panose="02010600040101010101" pitchFamily="2" charset="-122"/>
               <a:ea typeface="华文楷体" panose="02010600040101010101" pitchFamily="2" charset="-122"/>
             </a:endParaRPr>
           </a:p>
           <a:p>
-            <a:r>
-              <a:rPr lang="zh-CN" altLang="en-US" dirty="0">
-                <a:latin typeface="华文楷体" panose="02010600040101010101" pitchFamily="2" charset="-122"/>
-                <a:ea typeface="华文楷体" panose="02010600040101010101" pitchFamily="2" charset="-122"/>
-              </a:rPr>
-              <a:t>科研本质上是在执行枚举法</a:t>
-            </a:r>
             <a:endParaRPr lang="en-US" altLang="zh-CN" dirty="0">
               <a:latin typeface="华文楷体" panose="02010600040101010101" pitchFamily="2" charset="-122"/>
               <a:ea typeface="华文楷体" panose="02010600040101010101" pitchFamily="2" charset="-122"/>
             </a:endParaRPr>
           </a:p>
           <a:p>
-            <a:pPr lvl="1"/>
-            <a:r>
-              <a:rPr lang="zh-CN" altLang="en-US" dirty="0">
-                <a:latin typeface="华文楷体" panose="02010600040101010101" pitchFamily="2" charset="-122"/>
-                <a:ea typeface="华文楷体" panose="02010600040101010101" pitchFamily="2" charset="-122"/>
-              </a:rPr>
-              <a:t>低情商：</a:t>
-            </a:r>
+            <a:endParaRPr lang="en-US" altLang="zh-CN" dirty="0">
+              <a:latin typeface="华文楷体" panose="02010600040101010101" pitchFamily="2" charset="-122"/>
+              <a:ea typeface="华文楷体" panose="02010600040101010101" pitchFamily="2" charset="-122"/>
+            </a:endParaRPr>
+          </a:p>
+          <a:p>
             <a:r>
               <a:rPr lang="en-US" altLang="zh-CN" dirty="0">
                 <a:latin typeface="华文楷体" panose="02010600040101010101" pitchFamily="2" charset="-122"/>
                 <a:ea typeface="华文楷体" panose="02010600040101010101" pitchFamily="2" charset="-122"/>
               </a:rPr>
-              <a:t>Incremental</a:t>
-            </a:r>
-            <a:r>
-              <a:rPr lang="zh-CN" altLang="en-US" dirty="0">
-                <a:latin typeface="华文楷体" panose="02010600040101010101" pitchFamily="2" charset="-122"/>
-                <a:ea typeface="华文楷体" panose="02010600040101010101" pitchFamily="2" charset="-122"/>
-              </a:rPr>
-              <a:t>？</a:t>
+              <a:t>Huggingface SDXL pipeline</a:t>
             </a:r>
             <a:endParaRPr lang="en-US" altLang="zh-CN" dirty="0">
               <a:latin typeface="华文楷体" panose="02010600040101010101" pitchFamily="2" charset="-122"/>
@@ -7204,41 +7484,85 @@
             </a:endParaRPr>
           </a:p>
           <a:p>
-            <a:pPr lvl="1"/>
-            <a:r>
-              <a:rPr lang="zh-CN" altLang="en-US" dirty="0">
-                <a:latin typeface="华文楷体" panose="02010600040101010101" pitchFamily="2" charset="-122"/>
-                <a:ea typeface="华文楷体" panose="02010600040101010101" pitchFamily="2" charset="-122"/>
-              </a:rPr>
-              <a:t>高情商：</a:t>
-            </a:r>
-            <a:r>
-              <a:rPr lang="en-US" altLang="zh-CN" dirty="0">
-                <a:latin typeface="华文楷体" panose="02010600040101010101" pitchFamily="2" charset="-122"/>
-                <a:ea typeface="华文楷体" panose="02010600040101010101" pitchFamily="2" charset="-122"/>
-              </a:rPr>
-              <a:t>Solid</a:t>
-            </a:r>
-            <a:r>
-              <a:rPr lang="zh-CN" altLang="en-US" dirty="0">
-                <a:latin typeface="华文楷体" panose="02010600040101010101" pitchFamily="2" charset="-122"/>
-                <a:ea typeface="华文楷体" panose="02010600040101010101" pitchFamily="2" charset="-122"/>
-              </a:rPr>
-              <a:t>！</a:t>
-            </a:r>
             <a:endParaRPr lang="en-US" altLang="zh-CN" dirty="0">
               <a:latin typeface="华文楷体" panose="02010600040101010101" pitchFamily="2" charset="-122"/>
               <a:ea typeface="华文楷体" panose="02010600040101010101" pitchFamily="2" charset="-122"/>
             </a:endParaRPr>
           </a:p>
-          <a:p>
-            <a:endParaRPr lang="en-US" altLang="zh-CN" dirty="0">
-              <a:latin typeface="华文楷体" panose="02010600040101010101" pitchFamily="2" charset="-122"/>
-              <a:ea typeface="华文楷体" panose="02010600040101010101" pitchFamily="2" charset="-122"/>
-            </a:endParaRPr>
-          </a:p>
-        </p:txBody>
-      </p:sp>
+        </p:txBody>
+      </p:sp>
+      <p:pic>
+        <p:nvPicPr>
+          <p:cNvPr id="5" name="图片 4"/>
+          <p:cNvPicPr>
+            <a:picLocks noChangeAspect="1"/>
+          </p:cNvPicPr>
+          <p:nvPr/>
+        </p:nvPicPr>
+        <p:blipFill>
+          <a:blip r:embed="rId1"/>
+          <a:stretch>
+            <a:fillRect/>
+          </a:stretch>
+        </p:blipFill>
+        <p:spPr>
+          <a:xfrm>
+            <a:off x="3103880" y="1849755"/>
+            <a:ext cx="5984240" cy="1503680"/>
+          </a:xfrm>
+          <a:prstGeom prst="rect">
+            <a:avLst/>
+          </a:prstGeom>
+        </p:spPr>
+      </p:pic>
+      <p:pic>
+        <p:nvPicPr>
+          <p:cNvPr id="6" name="图片 5" descr="sdxl_20260422_191117_seed42"/>
+          <p:cNvPicPr>
+            <a:picLocks noChangeAspect="1"/>
+          </p:cNvPicPr>
+          <p:nvPr/>
+        </p:nvPicPr>
+        <p:blipFill>
+          <a:blip r:embed="rId2"/>
+          <a:stretch>
+            <a:fillRect/>
+          </a:stretch>
+        </p:blipFill>
+        <p:spPr>
+          <a:xfrm>
+            <a:off x="3103880" y="4046855"/>
+            <a:ext cx="2473960" cy="2473960"/>
+          </a:xfrm>
+          <a:prstGeom prst="rect">
+            <a:avLst/>
+          </a:prstGeom>
+        </p:spPr>
+      </p:pic>
+      <p:pic>
+        <p:nvPicPr>
+          <p:cNvPr id="7" name="图片 6" descr="sdxl_20260422_193308_seed42"/>
+          <p:cNvPicPr>
+            <a:picLocks noChangeAspect="1"/>
+          </p:cNvPicPr>
+          <p:nvPr/>
+        </p:nvPicPr>
+        <p:blipFill>
+          <a:blip r:embed="rId3"/>
+          <a:stretch>
+            <a:fillRect/>
+          </a:stretch>
+        </p:blipFill>
+        <p:spPr>
+          <a:xfrm>
+            <a:off x="6517005" y="4046855"/>
+            <a:ext cx="2440305" cy="2440305"/>
+          </a:xfrm>
+          <a:prstGeom prst="rect">
+            <a:avLst/>
+          </a:prstGeom>
+        </p:spPr>
+      </p:pic>
     </p:spTree>
   </p:cSld>
   <p:clrMapOvr>
@@ -7248,6 +7572,138 @@
 </file>
 
 <file path=ppt/slides/slide7.xml><?xml version="1.0" encoding="utf-8"?>
+<p:sld xmlns:a="http://schemas.openxmlformats.org/drawingml/2006/main" xmlns:r="http://schemas.openxmlformats.org/officeDocument/2006/relationships" xmlns:p="http://schemas.openxmlformats.org/presentationml/2006/main">
+  <p:cSld>
+    <p:spTree>
+      <p:nvGrpSpPr>
+        <p:cNvPr id="1" name=""/>
+        <p:cNvGrpSpPr/>
+        <p:nvPr/>
+      </p:nvGrpSpPr>
+      <p:grpSpPr>
+        <a:xfrm>
+          <a:off x="0" y="0"/>
+          <a:ext cx="0" cy="0"/>
+          <a:chOff x="0" y="0"/>
+          <a:chExt cx="0" cy="0"/>
+        </a:xfrm>
+      </p:grpSpPr>
+      <p:sp>
+        <p:nvSpPr>
+          <p:cNvPr id="2" name="标题 1"/>
+          <p:cNvSpPr>
+            <a:spLocks noGrp="1"/>
+          </p:cNvSpPr>
+          <p:nvPr>
+            <p:ph type="title"/>
+          </p:nvPr>
+        </p:nvSpPr>
+        <p:spPr/>
+        <p:txBody>
+          <a:bodyPr/>
+          <a:lstStyle/>
+          <a:p>
+            <a:r>
+              <a:rPr lang="en-US" altLang="zh-CN" dirty="0">
+                <a:latin typeface="华文楷体" panose="02010600040101010101" pitchFamily="2" charset="-122"/>
+                <a:ea typeface="华文楷体" panose="02010600040101010101" pitchFamily="2" charset="-122"/>
+              </a:rPr>
+              <a:t>More?</a:t>
+            </a:r>
+            <a:endParaRPr lang="zh-CN" altLang="en-US" dirty="0">
+              <a:latin typeface="华文楷体" panose="02010600040101010101" pitchFamily="2" charset="-122"/>
+              <a:ea typeface="华文楷体" panose="02010600040101010101" pitchFamily="2" charset="-122"/>
+            </a:endParaRPr>
+          </a:p>
+        </p:txBody>
+      </p:sp>
+      <p:sp>
+        <p:nvSpPr>
+          <p:cNvPr id="3" name="内容占位符 2"/>
+          <p:cNvSpPr>
+            <a:spLocks noGrp="1"/>
+          </p:cNvSpPr>
+          <p:nvPr>
+            <p:ph idx="1"/>
+          </p:nvPr>
+        </p:nvSpPr>
+        <p:spPr/>
+        <p:txBody>
+          <a:bodyPr>
+            <a:normAutofit/>
+          </a:bodyPr>
+          <a:lstStyle/>
+          <a:p>
+            <a:r>
+              <a:rPr lang="en-US" altLang="zh-CN" dirty="0">
+                <a:latin typeface="华文楷体" panose="02010600040101010101" pitchFamily="2" charset="-122"/>
+                <a:ea typeface="华文楷体" panose="02010600040101010101" pitchFamily="2" charset="-122"/>
+              </a:rPr>
+              <a:t>Math</a:t>
+            </a:r>
+            <a:endParaRPr lang="en-US" altLang="zh-CN" dirty="0">
+              <a:latin typeface="华文楷体" panose="02010600040101010101" pitchFamily="2" charset="-122"/>
+              <a:ea typeface="华文楷体" panose="02010600040101010101" pitchFamily="2" charset="-122"/>
+            </a:endParaRPr>
+          </a:p>
+          <a:p>
+            <a:r>
+              <a:rPr lang="en-US" altLang="zh-CN" dirty="0">
+                <a:latin typeface="华文楷体" panose="02010600040101010101" pitchFamily="2" charset="-122"/>
+                <a:ea typeface="华文楷体" panose="02010600040101010101" pitchFamily="2" charset="-122"/>
+              </a:rPr>
+              <a:t>Graphics—</a:t>
+            </a:r>
+            <a:r>
+              <a:rPr lang="en-US" altLang="zh-CN" dirty="0">
+                <a:latin typeface="华文楷体" panose="02010600040101010101" pitchFamily="2" charset="-122"/>
+                <a:ea typeface="华文楷体" panose="02010600040101010101" pitchFamily="2" charset="-122"/>
+                <a:sym typeface="+mn-ea"/>
+              </a:rPr>
+              <a:t>Games Series Courses(Optional)</a:t>
+            </a:r>
+            <a:endParaRPr lang="en-US" altLang="zh-CN" dirty="0">
+              <a:latin typeface="华文楷体" panose="02010600040101010101" pitchFamily="2" charset="-122"/>
+              <a:ea typeface="华文楷体" panose="02010600040101010101" pitchFamily="2" charset="-122"/>
+            </a:endParaRPr>
+          </a:p>
+          <a:p>
+            <a:r>
+              <a:rPr lang="en-US" altLang="zh-CN" dirty="0">
+                <a:latin typeface="华文楷体" panose="02010600040101010101" pitchFamily="2" charset="-122"/>
+                <a:ea typeface="华文楷体" panose="02010600040101010101" pitchFamily="2" charset="-122"/>
+              </a:rPr>
+              <a:t>Deep Generation Model</a:t>
+            </a:r>
+            <a:endParaRPr lang="en-US" altLang="zh-CN" dirty="0">
+              <a:latin typeface="华文楷体" panose="02010600040101010101" pitchFamily="2" charset="-122"/>
+              <a:ea typeface="华文楷体" panose="02010600040101010101" pitchFamily="2" charset="-122"/>
+            </a:endParaRPr>
+          </a:p>
+          <a:p>
+            <a:r>
+              <a:rPr lang="en-US" altLang="zh-CN" dirty="0">
+                <a:latin typeface="华文楷体" panose="02010600040101010101" pitchFamily="2" charset="-122"/>
+                <a:ea typeface="华文楷体" panose="02010600040101010101" pitchFamily="2" charset="-122"/>
+              </a:rPr>
+              <a:t>More paper reading accompanies the study of the above basics.</a:t>
+            </a:r>
+            <a:endParaRPr lang="en-US" altLang="zh-CN" dirty="0">
+              <a:latin typeface="华文楷体" panose="02010600040101010101" pitchFamily="2" charset="-122"/>
+              <a:ea typeface="华文楷体" panose="02010600040101010101" pitchFamily="2" charset="-122"/>
+            </a:endParaRPr>
+          </a:p>
+        </p:txBody>
+      </p:sp>
+    </p:spTree>
+  </p:cSld>
+  <p:clrMapOvr>
+    <a:masterClrMapping/>
+  </p:clrMapOvr>
+</p:sld>
+</file>
+
+<file path=ppt/slides/slide8.xml><?xml version="1.0" encoding="utf-8"?>
 <p:sld xmlns:a="http://schemas.openxmlformats.org/drawingml/2006/main" xmlns:r="http://schemas.openxmlformats.org/officeDocument/2006/relationships" xmlns:p="http://schemas.openxmlformats.org/presentationml/2006/main">
   <p:cSld>
     <p:spTree>
